--- a/decks/hist-holocaust/hist-holocaust_ch3_persecution-kristallnacht.pptx
+++ b/decks/hist-holocaust/hist-holocaust_ch3_persecution-kristallnacht.pptx
@@ -127,30 +127,30 @@
   <p:extLst>
     <p:ext uri="{521415D9-36F7-43E2-AB2F-B90AF26B5E84}">
       <p14:sectionLst xmlns:p14="http://schemas.microsoft.com/office/powerpoint/2010/main">
-        <p14:section name="Opening" id="{ffb53564-84bd-ca1b-52b7-3806be573e4f}">
+        <p14:section name="Opening" id="{cad03f0b-8808-ed68-1fe9-f5870bf602ab}">
           <p14:sldIdLst>
             <p14:sldId id="256"/>
           </p14:sldIdLst>
         </p14:section>
-        <p14:section name="Gate" id="{10bbab60-61c4-028b-0399-824f6a433fb8}">
+        <p14:section name="Gate" id="{0fcb75bd-f941-7317-0f2b-62df313951fe}">
           <p14:sldIdLst>
             <p14:sldId id="257"/>
             <p14:sldId id="258"/>
           </p14:sldIdLst>
         </p14:section>
-        <p14:section name="Pre-teach" id="{027bc954-78cf-b521-6c0b-ebca023dfcd7}">
+        <p14:section name="Pre-teach" id="{6dadeaaf-a6b7-0bd0-be48-31c16b3e137e}">
           <p14:sldIdLst>
             <p14:sldId id="259"/>
             <p14:sldId id="260"/>
           </p14:sldIdLst>
         </p14:section>
-        <p14:section name="Read-along" id="{574b0299-fbd3-1604-e290-ea4fbc26f6eb}">
+        <p14:section name="Read-along" id="{0db935ca-a09b-b47b-91e5-9a6b3aa5e04a}">
           <p14:sldIdLst>
             <p14:sldId id="261"/>
             <p14:sldId id="262"/>
           </p14:sldIdLst>
         </p14:section>
-        <p14:section name="Teach" id="{af84c591-d5f3-e43c-fc6d-481f8ff884b1}">
+        <p14:section name="Teach" id="{0a3fcd3e-59cc-4b56-0a6e-ded05f8d1e5b}">
           <p14:sldIdLst>
             <p14:sldId id="263"/>
             <p14:sldId id="264"/>
@@ -159,7 +159,7 @@
             <p14:sldId id="267"/>
           </p14:sldIdLst>
         </p14:section>
-        <p14:section name="Routes" id="{ba7a3678-61b3-6ce3-7099-09f15390ccca}">
+        <p14:section name="Routes" id="{cdb23046-09ff-8bba-8312-f1a3f6d605c3}">
           <p14:sldIdLst>
             <p14:sldId id="268"/>
             <p14:sldId id="269"/>
@@ -167,12 +167,12 @@
             <p14:sldId id="271"/>
           </p14:sldIdLst>
         </p14:section>
-        <p14:section name="Close" id="{2f39ceb8-1596-2981-4e8f-064faa9b5df6}">
+        <p14:section name="Close" id="{223813ad-3cec-314b-ccae-f4b685db48f1}">
           <p14:sldIdLst>
             <p14:sldId id="272"/>
           </p14:sldIdLst>
         </p14:section>
-        <p14:section name="Answers" id="{4936fe92-b522-8fb9-2ce3-e26abce819d5}">
+        <p14:section name="Answers" id="{27c492b7-d7e5-0b8f-e22e-64dd7a271ae1}">
           <p14:sldIdLst>
             <p14:sldId id="273"/>
             <p14:sldId id="274"/>
